--- a/Report writing/figures and tables/prisma flow chart/(Figure) Paper screening flowchart.pptx
+++ b/Report writing/figures and tables/prisma flow chart/(Figure) Paper screening flowchart.pptx
@@ -243,7 +243,7 @@
           <a:p>
             <a:fld id="{FBFB578F-CE61-D445-8E48-39808DB5B3FE}" type="datetimeFigureOut">
               <a:rPr lang="en-US" smtClean="0"/>
-              <a:t>12/19/22</a:t>
+              <a:t>1/2/23</a:t>
             </a:fld>
             <a:endParaRPr lang="en-US"/>
           </a:p>
@@ -413,7 +413,7 @@
           <a:p>
             <a:fld id="{FBFB578F-CE61-D445-8E48-39808DB5B3FE}" type="datetimeFigureOut">
               <a:rPr lang="en-US" smtClean="0"/>
-              <a:t>12/19/22</a:t>
+              <a:t>1/2/23</a:t>
             </a:fld>
             <a:endParaRPr lang="en-US"/>
           </a:p>
@@ -593,7 +593,7 @@
           <a:p>
             <a:fld id="{FBFB578F-CE61-D445-8E48-39808DB5B3FE}" type="datetimeFigureOut">
               <a:rPr lang="en-US" smtClean="0"/>
-              <a:t>12/19/22</a:t>
+              <a:t>1/2/23</a:t>
             </a:fld>
             <a:endParaRPr lang="en-US"/>
           </a:p>
@@ -763,7 +763,7 @@
           <a:p>
             <a:fld id="{FBFB578F-CE61-D445-8E48-39808DB5B3FE}" type="datetimeFigureOut">
               <a:rPr lang="en-US" smtClean="0"/>
-              <a:t>12/19/22</a:t>
+              <a:t>1/2/23</a:t>
             </a:fld>
             <a:endParaRPr lang="en-US"/>
           </a:p>
@@ -1007,7 +1007,7 @@
           <a:p>
             <a:fld id="{FBFB578F-CE61-D445-8E48-39808DB5B3FE}" type="datetimeFigureOut">
               <a:rPr lang="en-US" smtClean="0"/>
-              <a:t>12/19/22</a:t>
+              <a:t>1/2/23</a:t>
             </a:fld>
             <a:endParaRPr lang="en-US"/>
           </a:p>
@@ -1239,7 +1239,7 @@
           <a:p>
             <a:fld id="{FBFB578F-CE61-D445-8E48-39808DB5B3FE}" type="datetimeFigureOut">
               <a:rPr lang="en-US" smtClean="0"/>
-              <a:t>12/19/22</a:t>
+              <a:t>1/2/23</a:t>
             </a:fld>
             <a:endParaRPr lang="en-US"/>
           </a:p>
@@ -1606,7 +1606,7 @@
           <a:p>
             <a:fld id="{FBFB578F-CE61-D445-8E48-39808DB5B3FE}" type="datetimeFigureOut">
               <a:rPr lang="en-US" smtClean="0"/>
-              <a:t>12/19/22</a:t>
+              <a:t>1/2/23</a:t>
             </a:fld>
             <a:endParaRPr lang="en-US"/>
           </a:p>
@@ -1724,7 +1724,7 @@
           <a:p>
             <a:fld id="{FBFB578F-CE61-D445-8E48-39808DB5B3FE}" type="datetimeFigureOut">
               <a:rPr lang="en-US" smtClean="0"/>
-              <a:t>12/19/22</a:t>
+              <a:t>1/2/23</a:t>
             </a:fld>
             <a:endParaRPr lang="en-US"/>
           </a:p>
@@ -1819,7 +1819,7 @@
           <a:p>
             <a:fld id="{FBFB578F-CE61-D445-8E48-39808DB5B3FE}" type="datetimeFigureOut">
               <a:rPr lang="en-US" smtClean="0"/>
-              <a:t>12/19/22</a:t>
+              <a:t>1/2/23</a:t>
             </a:fld>
             <a:endParaRPr lang="en-US"/>
           </a:p>
@@ -2096,7 +2096,7 @@
           <a:p>
             <a:fld id="{FBFB578F-CE61-D445-8E48-39808DB5B3FE}" type="datetimeFigureOut">
               <a:rPr lang="en-US" smtClean="0"/>
-              <a:t>12/19/22</a:t>
+              <a:t>1/2/23</a:t>
             </a:fld>
             <a:endParaRPr lang="en-US"/>
           </a:p>
@@ -2353,7 +2353,7 @@
           <a:p>
             <a:fld id="{FBFB578F-CE61-D445-8E48-39808DB5B3FE}" type="datetimeFigureOut">
               <a:rPr lang="en-US" smtClean="0"/>
-              <a:t>12/19/22</a:t>
+              <a:t>1/2/23</a:t>
             </a:fld>
             <a:endParaRPr lang="en-US"/>
           </a:p>
@@ -2566,7 +2566,7 @@
           <a:p>
             <a:fld id="{FBFB578F-CE61-D445-8E48-39808DB5B3FE}" type="datetimeFigureOut">
               <a:rPr lang="en-US" smtClean="0"/>
-              <a:t>12/19/22</a:t>
+              <a:t>1/2/23</a:t>
             </a:fld>
             <a:endParaRPr lang="en-US"/>
           </a:p>
@@ -3335,7 +3335,7 @@
                 <a:latin typeface="Arial" panose="020B0604020202020204" pitchFamily="34" charset="0"/>
                 <a:ea typeface="SimSun" panose="02010600030101010101" pitchFamily="2" charset="-122"/>
               </a:rPr>
-              <a:t>2369 records excluded through Rayyan-assisted screening</a:t>
+              <a:t>2369 records excluded through title and abstract screening</a:t>
             </a:r>
           </a:p>
         </p:txBody>
@@ -4076,7 +4076,7 @@
                 <a:latin typeface="Arial" panose="020B0604020202020204" pitchFamily="34" charset="0"/>
                 <a:ea typeface="SimSun" panose="02010600030101010101" pitchFamily="2" charset="-122"/>
               </a:rPr>
-              <a:t>76)</a:t>
+              <a:t>77)</a:t>
             </a:r>
             <a:endParaRPr lang="en-GB" sz="1050" dirty="0">
               <a:solidFill>
@@ -4322,14 +4322,14 @@
           <a:p>
             <a:pPr algn="ctr"/>
             <a:r>
-              <a:rPr lang="en-US" altLang="zh-CN" sz="1300" dirty="0">
-                <a:solidFill>
-                  <a:srgbClr val="000000"/>
-                </a:solidFill>
-                <a:latin typeface="Arial" panose="020B0604020202020204" pitchFamily="34" charset="0"/>
-                <a:ea typeface="SimSun" panose="02010600030101010101" pitchFamily="2" charset="-122"/>
-              </a:rPr>
-              <a:t>7</a:t>
+              <a:rPr lang="en-US" sz="1300" dirty="0">
+                <a:solidFill>
+                  <a:srgbClr val="000000"/>
+                </a:solidFill>
+                <a:latin typeface="Arial" panose="020B0604020202020204" pitchFamily="34" charset="0"/>
+                <a:ea typeface="SimSun" panose="02010600030101010101" pitchFamily="2" charset="-122"/>
+              </a:rPr>
+              <a:t>6</a:t>
             </a:r>
             <a:r>
               <a:rPr lang="en-GB" sz="1300" dirty="0">
@@ -4947,7 +4947,7 @@
                 <a:latin typeface="Arial" panose="020B0604020202020204" pitchFamily="34" charset="0"/>
                 <a:ea typeface="SimSun" panose="02010600030101010101" pitchFamily="2" charset="-122"/>
               </a:rPr>
-              <a:t>27</a:t>
+              <a:t>26</a:t>
             </a:r>
             <a:r>
               <a:rPr lang="en-GB" sz="1300" dirty="0">
@@ -5263,9 +5263,9 @@
           <p:nvPr/>
         </p:nvCxnSpPr>
         <p:spPr>
-          <a:xfrm flipH="1">
-            <a:off x="1938188" y="2911136"/>
-            <a:ext cx="1" cy="5260559"/>
+          <a:xfrm>
+            <a:off x="1938188" y="2859216"/>
+            <a:ext cx="0" cy="5312479"/>
           </a:xfrm>
           <a:prstGeom prst="straightConnector1">
             <a:avLst/>
